--- a/classes/parte-4-seguridad-de-aplicaciones-web/098-cross-site-request-forgery-csrf/clase-098-presentacion.pptx
+++ b/classes/parte-4-seguridad-de-aplicaciones-web/098-cross-site-request-forgery-csrf/clase-098-presentacion.pptx
@@ -17,6 +17,9 @@
     <p:sldId id="265" r:id="rId16"/>
     <p:sldId id="266" r:id="rId17"/>
     <p:sldId id="267" r:id="rId18"/>
+    <p:sldId id="268" r:id="rId19"/>
+    <p:sldId id="269" r:id="rId20"/>
+    <p:sldId id="270" r:id="rId21"/>
   </p:sldIdLst>
   <p:sldSz cx="9144000" cy="6858000" type="screen4x3"/>
   <p:notesSz cx="6858000" cy="9144000"/>
@@ -3198,7 +3201,7 @@
                   <a:srgbClr val="0B3D2E"/>
                 </a:solidFill>
               </a:rPr>
-              <a:t>⚠️ Errores comunes</a:t>
+              <a:t>✍️ Ejercicios</a:t>
             </a:r>
           </a:p>
         </p:txBody>
@@ -3236,67 +3239,82 @@
                   <a:srgbClr val="22282E"/>
                 </a:solidFill>
               </a:rPr>
-              <a:t>•  El PoC no dispara la acción — Falta el token válido; el endpoint sí lo valida</a:t>
-            </a:r>
-          </a:p>
-          <a:p>
-            <a:pPr>
-              <a:spcAft>
-                <a:spcPts val="600"/>
-              </a:spcAft>
-            </a:pPr>
-            <a:r>
-              <a:rPr sz="1500">
-                <a:solidFill>
-                  <a:srgbClr val="22282E"/>
-                </a:solidFill>
-              </a:rPr>
-              <a:t>•  SameSite bloquea el ataque — Cookie Lax/Strict; el CSRF clásico ya no aplica</a:t>
-            </a:r>
-          </a:p>
-          <a:p>
-            <a:pPr>
-              <a:spcAft>
-                <a:spcPts val="600"/>
-              </a:spcAft>
-            </a:pPr>
-            <a:r>
-              <a:rPr sz="1500">
-                <a:solidFill>
-                  <a:srgbClr val="22282E"/>
-                </a:solidFill>
-              </a:rPr>
-              <a:t>•  POST JSON no explotable — El navegador no envía JSON cross-site sin CORS</a:t>
-            </a:r>
-          </a:p>
-          <a:p>
-            <a:pPr>
-              <a:spcAft>
-                <a:spcPts val="600"/>
-              </a:spcAft>
-            </a:pPr>
-            <a:r>
-              <a:rPr sz="1500">
-                <a:solidFill>
-                  <a:srgbClr val="22282E"/>
-                </a:solidFill>
-              </a:rPr>
-              <a:t>•  Token estático reutilizable — Debilidad real; repórtalo</a:t>
-            </a:r>
-          </a:p>
-          <a:p>
-            <a:pPr>
-              <a:spcAft>
-                <a:spcPts val="600"/>
-              </a:spcAft>
-            </a:pPr>
-            <a:r>
-              <a:rPr sz="1500">
-                <a:solidFill>
-                  <a:srgbClr val="22282E"/>
-                </a:solidFill>
-              </a:rPr>
-              <a:t>•  Referer/Origin bloquean — La app valida origen; busca otro vector</a:t>
+              <a:t>•  Construye un PoC GET y otro POST para la misma acción.</a:t>
+            </a:r>
+          </a:p>
+          <a:p>
+            <a:pPr>
+              <a:spcAft>
+                <a:spcPts val="600"/>
+              </a:spcAft>
+            </a:pPr>
+            <a:r>
+              <a:rPr sz="1500">
+                <a:solidFill>
+                  <a:srgbClr val="22282E"/>
+                </a:solidFill>
+              </a:rPr>
+              <a:t>•  Explica por qué SameSite=Strict puede romper flujos legítimos.</a:t>
+            </a:r>
+          </a:p>
+          <a:p>
+            <a:pPr>
+              <a:spcAft>
+                <a:spcPts val="600"/>
+              </a:spcAft>
+            </a:pPr>
+            <a:r>
+              <a:rPr sz="1500">
+                <a:solidFill>
+                  <a:srgbClr val="22282E"/>
+                </a:solidFill>
+              </a:rPr>
+              <a:t>•  Evade un token que se valida solo por presencia (no por valor).</a:t>
+            </a:r>
+          </a:p>
+          <a:p>
+            <a:pPr>
+              <a:spcAft>
+                <a:spcPts val="600"/>
+              </a:spcAft>
+            </a:pPr>
+            <a:r>
+              <a:rPr sz="1500">
+                <a:solidFill>
+                  <a:srgbClr val="22282E"/>
+                </a:solidFill>
+              </a:rPr>
+              <a:t>•  Analiza si un endpoint JSON con Content-Type: application/json es CSRF-eable.</a:t>
+            </a:r>
+          </a:p>
+          <a:p>
+            <a:pPr>
+              <a:spcAft>
+                <a:spcPts val="600"/>
+              </a:spcAft>
+            </a:pPr>
+            <a:r>
+              <a:rPr sz="1500">
+                <a:solidFill>
+                  <a:srgbClr val="22282E"/>
+                </a:solidFill>
+              </a:rPr>
+              <a:t>•  Diseña la defensa: token sincronizado + SameSite + verificación de Origin.</a:t>
+            </a:r>
+          </a:p>
+          <a:p>
+            <a:pPr>
+              <a:spcAft>
+                <a:spcPts val="600"/>
+              </a:spcAft>
+            </a:pPr>
+            <a:r>
+              <a:rPr sz="1500">
+                <a:solidFill>
+                  <a:srgbClr val="22282E"/>
+                </a:solidFill>
+              </a:rPr>
+              <a:t>•  Diferencia CSRF de SSRF (nombres parecidos, ataques opuestos).</a:t>
             </a:r>
           </a:p>
         </p:txBody>
@@ -3347,7 +3365,7 @@
                   <a:srgbClr val="0B3D2E"/>
                 </a:solidFill>
               </a:rPr>
-              <a:t>❓ Preguntas frecuentes</a:t>
+              <a:t>📝 Reto verificable</a:t>
             </a:r>
           </a:p>
         </p:txBody>
@@ -3385,82 +3403,22 @@
                   <a:srgbClr val="22282E"/>
                 </a:solidFill>
               </a:rPr>
-              <a:t>•  ❓ ¿SameSite mató el CSRF?</a:t>
-            </a:r>
-          </a:p>
-          <a:p>
-            <a:pPr>
-              <a:spcAft>
-                <a:spcPts val="600"/>
-              </a:spcAft>
-            </a:pPr>
-            <a:r>
-              <a:rPr sz="1500">
-                <a:solidFill>
-                  <a:srgbClr val="22282E"/>
-                </a:solidFill>
-              </a:rPr>
-              <a:t>•  Lo redujo mucho, pero no del todo: hay SameSite=None, flujos GET sensibles y navegadores/configuraciones variados. Mantén tokens.</a:t>
-            </a:r>
-          </a:p>
-          <a:p>
-            <a:pPr>
-              <a:spcAft>
-                <a:spcPts val="600"/>
-              </a:spcAft>
-            </a:pPr>
-            <a:r>
-              <a:rPr sz="1500">
-                <a:solidFill>
-                  <a:srgbClr val="22282E"/>
-                </a:solidFill>
-              </a:rPr>
-              <a:t>•  ❓ ¿Las APIs REST necesitan protección CSRF?</a:t>
-            </a:r>
-          </a:p>
-          <a:p>
-            <a:pPr>
-              <a:spcAft>
-                <a:spcPts val="600"/>
-              </a:spcAft>
-            </a:pPr>
-            <a:r>
-              <a:rPr sz="1500">
-                <a:solidFill>
-                  <a:srgbClr val="22282E"/>
-                </a:solidFill>
-              </a:rPr>
-              <a:t>•  Si autentican por cookie, sí. Si usan tokens en cabecera (Bearer), el CSRF clásico no aplica.</a:t>
-            </a:r>
-          </a:p>
-          <a:p>
-            <a:pPr>
-              <a:spcAft>
-                <a:spcPts val="600"/>
-              </a:spcAft>
-            </a:pPr>
-            <a:r>
-              <a:rPr sz="1500">
-                <a:solidFill>
-                  <a:srgbClr val="22282E"/>
-                </a:solidFill>
-              </a:rPr>
-              <a:t>•  ❓ ¿Un token en URL sirve?</a:t>
-            </a:r>
-          </a:p>
-          <a:p>
-            <a:pPr>
-              <a:spcAft>
-                <a:spcPts val="600"/>
-              </a:spcAft>
-            </a:pPr>
-            <a:r>
-              <a:rPr sz="1500">
-                <a:solidFill>
-                  <a:srgbClr val="22282E"/>
-                </a:solidFill>
-              </a:rPr>
-              <a:t>•  Es riesgoso: se filtra por Referer, logs e historial. Mejor en cuerpo o cabecera.</a:t>
+              <a:t>•  Resuelve un lab de CSRF de PortSwigger que tenga una defensa parcial (token mal validado) y demuestra el cambio de email de la víctima.</a:t>
+            </a:r>
+          </a:p>
+          <a:p>
+            <a:pPr>
+              <a:spcAft>
+                <a:spcPts val="600"/>
+              </a:spcAft>
+            </a:pPr>
+            <a:r>
+              <a:rPr sz="1500">
+                <a:solidFill>
+                  <a:srgbClr val="22282E"/>
+                </a:solidFill>
+              </a:rPr>
+              <a:t>•  Criterio de aceptación: el lab queda resuelto, entregas el PoC funcional y explicas exactamente qué debilidad del token permitió el bypass y cómo se corrige.</a:t>
             </a:r>
           </a:p>
         </p:txBody>
@@ -3511,7 +3469,7 @@
                   <a:srgbClr val="0B3D2E"/>
                 </a:solidFill>
               </a:rPr>
-              <a:t>🔗 Referencias</a:t>
+              <a:t>⚠️ Errores comunes</a:t>
             </a:r>
           </a:p>
         </p:txBody>
@@ -3549,6 +3507,319 @@
                   <a:srgbClr val="22282E"/>
                 </a:solidFill>
               </a:rPr>
+              <a:t>•  El PoC no dispara la acción — Falta el token válido; el endpoint sí lo valida</a:t>
+            </a:r>
+          </a:p>
+          <a:p>
+            <a:pPr>
+              <a:spcAft>
+                <a:spcPts val="600"/>
+              </a:spcAft>
+            </a:pPr>
+            <a:r>
+              <a:rPr sz="1500">
+                <a:solidFill>
+                  <a:srgbClr val="22282E"/>
+                </a:solidFill>
+              </a:rPr>
+              <a:t>•  SameSite bloquea el ataque — Cookie Lax/Strict; el CSRF clásico ya no aplica</a:t>
+            </a:r>
+          </a:p>
+          <a:p>
+            <a:pPr>
+              <a:spcAft>
+                <a:spcPts val="600"/>
+              </a:spcAft>
+            </a:pPr>
+            <a:r>
+              <a:rPr sz="1500">
+                <a:solidFill>
+                  <a:srgbClr val="22282E"/>
+                </a:solidFill>
+              </a:rPr>
+              <a:t>•  POST JSON no explotable — El navegador no envía JSON cross-site sin CORS</a:t>
+            </a:r>
+          </a:p>
+          <a:p>
+            <a:pPr>
+              <a:spcAft>
+                <a:spcPts val="600"/>
+              </a:spcAft>
+            </a:pPr>
+            <a:r>
+              <a:rPr sz="1500">
+                <a:solidFill>
+                  <a:srgbClr val="22282E"/>
+                </a:solidFill>
+              </a:rPr>
+              <a:t>•  Token estático reutilizable — Debilidad real; repórtalo</a:t>
+            </a:r>
+          </a:p>
+          <a:p>
+            <a:pPr>
+              <a:spcAft>
+                <a:spcPts val="600"/>
+              </a:spcAft>
+            </a:pPr>
+            <a:r>
+              <a:rPr sz="1500">
+                <a:solidFill>
+                  <a:srgbClr val="22282E"/>
+                </a:solidFill>
+              </a:rPr>
+              <a:t>•  Referer/Origin bloquean — La app valida origen; busca otro vector</a:t>
+            </a:r>
+          </a:p>
+        </p:txBody>
+      </p:sp>
+    </p:spTree>
+  </p:cSld>
+  <p:clrMapOvr>
+    <a:masterClrMapping/>
+  </p:clrMapOvr>
+</p:sld>
+</file>
+
+<file path=ppt/slides/slide13.xml><?xml version="1.0" encoding="utf-8"?>
+<p:sld xmlns:a="http://schemas.openxmlformats.org/drawingml/2006/main" xmlns:p="http://schemas.openxmlformats.org/presentationml/2006/main" xmlns:r="http://schemas.openxmlformats.org/officeDocument/2006/relationships">
+  <p:cSld>
+    <p:spTree>
+      <p:nvGrpSpPr>
+        <p:cNvPr id="1" name=""/>
+        <p:cNvGrpSpPr/>
+        <p:nvPr/>
+      </p:nvGrpSpPr>
+      <p:grpSpPr/>
+      <p:sp>
+        <p:nvSpPr>
+          <p:cNvPr id="2" name="TextBox 1"/>
+          <p:cNvSpPr txBox="1"/>
+          <p:nvPr/>
+        </p:nvSpPr>
+        <p:spPr>
+          <a:xfrm>
+            <a:off x="457200" y="320040"/>
+            <a:ext cx="8229600" cy="822960"/>
+          </a:xfrm>
+          <a:prstGeom prst="rect">
+            <a:avLst/>
+          </a:prstGeom>
+          <a:noFill/>
+        </p:spPr>
+        <p:txBody>
+          <a:bodyPr wrap="square">
+            <a:spAutoFit/>
+          </a:bodyPr>
+          <a:lstStyle/>
+          <a:p>
+            <a:r>
+              <a:rPr sz="2600" b="1">
+                <a:solidFill>
+                  <a:srgbClr val="0B3D2E"/>
+                </a:solidFill>
+              </a:rPr>
+              <a:t>❓ Preguntas frecuentes</a:t>
+            </a:r>
+          </a:p>
+        </p:txBody>
+      </p:sp>
+      <p:sp>
+        <p:nvSpPr>
+          <p:cNvPr id="3" name="TextBox 2"/>
+          <p:cNvSpPr txBox="1"/>
+          <p:nvPr/>
+        </p:nvSpPr>
+        <p:spPr>
+          <a:xfrm>
+            <a:off x="457200" y="1280160"/>
+            <a:ext cx="8229600" cy="4937760"/>
+          </a:xfrm>
+          <a:prstGeom prst="rect">
+            <a:avLst/>
+          </a:prstGeom>
+          <a:noFill/>
+        </p:spPr>
+        <p:txBody>
+          <a:bodyPr wrap="square">
+            <a:spAutoFit/>
+          </a:bodyPr>
+          <a:lstStyle/>
+          <a:p>
+            <a:pPr>
+              <a:spcAft>
+                <a:spcPts val="600"/>
+              </a:spcAft>
+            </a:pPr>
+            <a:r>
+              <a:rPr sz="1500">
+                <a:solidFill>
+                  <a:srgbClr val="22282E"/>
+                </a:solidFill>
+              </a:rPr>
+              <a:t>•  ❓ ¿SameSite mató el CSRF?</a:t>
+            </a:r>
+          </a:p>
+          <a:p>
+            <a:pPr>
+              <a:spcAft>
+                <a:spcPts val="600"/>
+              </a:spcAft>
+            </a:pPr>
+            <a:r>
+              <a:rPr sz="1500">
+                <a:solidFill>
+                  <a:srgbClr val="22282E"/>
+                </a:solidFill>
+              </a:rPr>
+              <a:t>•  Lo redujo mucho, pero no del todo: hay SameSite=None, flujos GET sensibles y navegadores/configuraciones variados. Mantén tokens.</a:t>
+            </a:r>
+          </a:p>
+          <a:p>
+            <a:pPr>
+              <a:spcAft>
+                <a:spcPts val="600"/>
+              </a:spcAft>
+            </a:pPr>
+            <a:r>
+              <a:rPr sz="1500">
+                <a:solidFill>
+                  <a:srgbClr val="22282E"/>
+                </a:solidFill>
+              </a:rPr>
+              <a:t>•  ❓ ¿Las APIs REST necesitan protección CSRF?</a:t>
+            </a:r>
+          </a:p>
+          <a:p>
+            <a:pPr>
+              <a:spcAft>
+                <a:spcPts val="600"/>
+              </a:spcAft>
+            </a:pPr>
+            <a:r>
+              <a:rPr sz="1500">
+                <a:solidFill>
+                  <a:srgbClr val="22282E"/>
+                </a:solidFill>
+              </a:rPr>
+              <a:t>•  Si autentican por cookie, sí. Si usan tokens en cabecera (Bearer), el CSRF clásico no aplica.</a:t>
+            </a:r>
+          </a:p>
+          <a:p>
+            <a:pPr>
+              <a:spcAft>
+                <a:spcPts val="600"/>
+              </a:spcAft>
+            </a:pPr>
+            <a:r>
+              <a:rPr sz="1500">
+                <a:solidFill>
+                  <a:srgbClr val="22282E"/>
+                </a:solidFill>
+              </a:rPr>
+              <a:t>•  ❓ ¿Un token en URL sirve?</a:t>
+            </a:r>
+          </a:p>
+          <a:p>
+            <a:pPr>
+              <a:spcAft>
+                <a:spcPts val="600"/>
+              </a:spcAft>
+            </a:pPr>
+            <a:r>
+              <a:rPr sz="1500">
+                <a:solidFill>
+                  <a:srgbClr val="22282E"/>
+                </a:solidFill>
+              </a:rPr>
+              <a:t>•  Es riesgoso: se filtra por Referer, logs e historial. Mejor en cuerpo o cabecera.</a:t>
+            </a:r>
+          </a:p>
+        </p:txBody>
+      </p:sp>
+    </p:spTree>
+  </p:cSld>
+  <p:clrMapOvr>
+    <a:masterClrMapping/>
+  </p:clrMapOvr>
+</p:sld>
+</file>
+
+<file path=ppt/slides/slide14.xml><?xml version="1.0" encoding="utf-8"?>
+<p:sld xmlns:a="http://schemas.openxmlformats.org/drawingml/2006/main" xmlns:p="http://schemas.openxmlformats.org/presentationml/2006/main" xmlns:r="http://schemas.openxmlformats.org/officeDocument/2006/relationships">
+  <p:cSld>
+    <p:spTree>
+      <p:nvGrpSpPr>
+        <p:cNvPr id="1" name=""/>
+        <p:cNvGrpSpPr/>
+        <p:nvPr/>
+      </p:nvGrpSpPr>
+      <p:grpSpPr/>
+      <p:sp>
+        <p:nvSpPr>
+          <p:cNvPr id="2" name="TextBox 1"/>
+          <p:cNvSpPr txBox="1"/>
+          <p:nvPr/>
+        </p:nvSpPr>
+        <p:spPr>
+          <a:xfrm>
+            <a:off x="457200" y="320040"/>
+            <a:ext cx="8229600" cy="822960"/>
+          </a:xfrm>
+          <a:prstGeom prst="rect">
+            <a:avLst/>
+          </a:prstGeom>
+          <a:noFill/>
+        </p:spPr>
+        <p:txBody>
+          <a:bodyPr wrap="square">
+            <a:spAutoFit/>
+          </a:bodyPr>
+          <a:lstStyle/>
+          <a:p>
+            <a:r>
+              <a:rPr sz="2600" b="1">
+                <a:solidFill>
+                  <a:srgbClr val="0B3D2E"/>
+                </a:solidFill>
+              </a:rPr>
+              <a:t>🔗 Referencias</a:t>
+            </a:r>
+          </a:p>
+        </p:txBody>
+      </p:sp>
+      <p:sp>
+        <p:nvSpPr>
+          <p:cNvPr id="3" name="TextBox 2"/>
+          <p:cNvSpPr txBox="1"/>
+          <p:nvPr/>
+        </p:nvSpPr>
+        <p:spPr>
+          <a:xfrm>
+            <a:off x="457200" y="1280160"/>
+            <a:ext cx="8229600" cy="4937760"/>
+          </a:xfrm>
+          <a:prstGeom prst="rect">
+            <a:avLst/>
+          </a:prstGeom>
+          <a:noFill/>
+        </p:spPr>
+        <p:txBody>
+          <a:bodyPr wrap="square">
+            <a:spAutoFit/>
+          </a:bodyPr>
+          <a:lstStyle/>
+          <a:p>
+            <a:pPr>
+              <a:spcAft>
+                <a:spcPts val="600"/>
+              </a:spcAft>
+            </a:pPr>
+            <a:r>
+              <a:rPr sz="1500">
+                <a:solidFill>
+                  <a:srgbClr val="22282E"/>
+                </a:solidFill>
+              </a:rPr>
               <a:t>•  Stuttard &amp; Pinto, The Web Application Hacker's Handbook, cap. 13.</a:t>
             </a:r>
           </a:p>
@@ -3599,6 +3870,81 @@
           </a:p>
         </p:txBody>
       </p:sp>
+    </p:spTree>
+  </p:cSld>
+  <p:clrMapOvr>
+    <a:masterClrMapping/>
+  </p:clrMapOvr>
+</p:sld>
+</file>
+
+<file path=ppt/slides/slide15.xml><?xml version="1.0" encoding="utf-8"?>
+<p:sld xmlns:a="http://schemas.openxmlformats.org/drawingml/2006/main" xmlns:p="http://schemas.openxmlformats.org/presentationml/2006/main" xmlns:r="http://schemas.openxmlformats.org/officeDocument/2006/relationships">
+  <p:cSld>
+    <p:spTree>
+      <p:nvGrpSpPr>
+        <p:cNvPr id="1" name=""/>
+        <p:cNvGrpSpPr/>
+        <p:nvPr/>
+      </p:nvGrpSpPr>
+      <p:grpSpPr/>
+      <p:sp>
+        <p:nvSpPr>
+          <p:cNvPr id="2" name="TextBox 1"/>
+          <p:cNvSpPr txBox="1"/>
+          <p:nvPr/>
+        </p:nvSpPr>
+        <p:spPr>
+          <a:xfrm>
+            <a:off x="457200" y="274320"/>
+            <a:ext cx="8229600" cy="640080"/>
+          </a:xfrm>
+          <a:prstGeom prst="rect">
+            <a:avLst/>
+          </a:prstGeom>
+          <a:noFill/>
+        </p:spPr>
+        <p:txBody>
+          <a:bodyPr wrap="square">
+            <a:spAutoFit/>
+          </a:bodyPr>
+          <a:lstStyle/>
+          <a:p>
+            <a:r>
+              <a:rPr sz="2200" b="1">
+                <a:solidFill>
+                  <a:srgbClr val="0B3D2E"/>
+                </a:solidFill>
+              </a:rPr>
+              <a:t>Diagrama de la clase</a:t>
+            </a:r>
+          </a:p>
+        </p:txBody>
+      </p:sp>
+      <p:pic>
+        <p:nvPicPr>
+          <p:cNvPr id="3" name="Picture 2" descr="8dede44fa82a316c.png"/>
+          <p:cNvPicPr>
+            <a:picLocks noChangeAspect="1"/>
+          </p:cNvPicPr>
+          <p:nvPr/>
+        </p:nvPicPr>
+        <p:blipFill>
+          <a:blip r:embed="rId2"/>
+          <a:stretch>
+            <a:fillRect/>
+          </a:stretch>
+        </p:blipFill>
+        <p:spPr>
+          <a:xfrm>
+            <a:off x="457200" y="1636576"/>
+            <a:ext cx="8229600" cy="4224928"/>
+          </a:xfrm>
+          <a:prstGeom prst="rect">
+            <a:avLst/>
+          </a:prstGeom>
+        </p:spPr>
+      </p:pic>
     </p:spTree>
   </p:cSld>
   <p:clrMapOvr>
@@ -3683,7 +4029,7 @@
                   <a:srgbClr val="22282E"/>
                 </a:solidFill>
               </a:rPr>
-              <a:t>•  Entender el CSRF (falsificación de petición entre sitios): forzar al navegador de una víctima autenticada a ejecutar acciones no deseadas. Aprenderás a construir PoCs, evaluar cuándo una defensa es efectiva y por qué SameSite y los tokens anti-CSRF funcionan.</a:t>
+              <a:t>•  Entender el CSRF (falsificación de petición entre sitios): forzar al navegador de una víctima autenticada a ejecutar acciones no deseadas. Aprenderás a construir PoCs, evaluar cuándo una defensa es…</a:t>
             </a:r>
           </a:p>
         </p:txBody>
@@ -4077,7 +4423,7 @@
                   <a:srgbClr val="0B3D2E"/>
                 </a:solidFill>
               </a:rPr>
-              <a:t>📖 Definiciones y características</a:t>
+              <a:t>🧠 Explicación en profundidad</a:t>
             </a:r>
           </a:p>
         </p:txBody>
@@ -4115,82 +4461,97 @@
                   <a:srgbClr val="22282E"/>
                 </a:solidFill>
               </a:rPr>
-              <a:t>•  CSRF: forzar una acción autenticada usando la sesión de la víctima desde otro sitio. Característica: explota que el navegador envía cookies automáticamente.</a:t>
-            </a:r>
-          </a:p>
-          <a:p>
-            <a:pPr>
-              <a:spcAft>
-                <a:spcPts val="600"/>
-              </a:spcAft>
-            </a:pPr>
-            <a:r>
-              <a:rPr sz="1500">
-                <a:solidFill>
-                  <a:srgbClr val="22282E"/>
-                </a:solidFill>
-              </a:rPr>
-              <a:t>•  Token anti-CSRF: valor impredecible ligado a la sesión que debe acompañar cada acción. Característica: el atacante no puede adivinarlo.</a:t>
-            </a:r>
-          </a:p>
-          <a:p>
-            <a:pPr>
-              <a:spcAft>
-                <a:spcPts val="600"/>
-              </a:spcAft>
-            </a:pPr>
-            <a:r>
-              <a:rPr sz="1500">
-                <a:solidFill>
-                  <a:srgbClr val="22282E"/>
-                </a:solidFill>
-              </a:rPr>
-              <a:t>•  SameSite: atributo de cookie que limita su envío entre sitios. Característica: Lax/Strict mitigan gran parte del CSRF.</a:t>
-            </a:r>
-          </a:p>
-          <a:p>
-            <a:pPr>
-              <a:spcAft>
-                <a:spcPts val="600"/>
-              </a:spcAft>
-            </a:pPr>
-            <a:r>
-              <a:rPr sz="1500">
-                <a:solidFill>
-                  <a:srgbClr val="22282E"/>
-                </a:solidFill>
-              </a:rPr>
-              <a:t>•  Verificación de Origin/Referer: comprobar el origen de la petición. Característica: defensa complementaria.</a:t>
-            </a:r>
-          </a:p>
-          <a:p>
-            <a:pPr>
-              <a:spcAft>
-                <a:spcPts val="600"/>
-              </a:spcAft>
-            </a:pPr>
-            <a:r>
-              <a:rPr sz="1500">
-                <a:solidFill>
-                  <a:srgbClr val="22282E"/>
-                </a:solidFill>
-              </a:rPr>
-              <a:t>•  PoC (Proof of Concept): página que dispara la acción automáticamente. Característica: prueba el impacto real.</a:t>
-            </a:r>
-          </a:p>
-          <a:p>
-            <a:pPr>
-              <a:spcAft>
-                <a:spcPts val="600"/>
-              </a:spcAft>
-            </a:pPr>
-            <a:r>
-              <a:rPr sz="1500">
-                <a:solidFill>
-                  <a:srgbClr val="22282E"/>
-                </a:solidFill>
-              </a:rPr>
-              <a:t>•  Double-submit cookie: patrón donde el token va en cookie y en cuerpo. Característica: alternativa sin estado en servidor.</a:t>
+              <a:t>•  El Cross-Site Request Forgery explota una decisión de diseño del navegador: cuando una página</a:t>
+            </a:r>
+          </a:p>
+          <a:p>
+            <a:pPr>
+              <a:spcAft>
+                <a:spcPts val="600"/>
+              </a:spcAft>
+            </a:pPr>
+            <a:r>
+              <a:rPr sz="1500">
+                <a:solidFill>
+                  <a:srgbClr val="22282E"/>
+                </a:solidFill>
+              </a:rPr>
+              <a:t>•  —cualquiera— hace una petición a un sitio, el navegador adjunta automáticamente las cookies</a:t>
+            </a:r>
+          </a:p>
+          <a:p>
+            <a:pPr>
+              <a:spcAft>
+                <a:spcPts val="600"/>
+              </a:spcAft>
+            </a:pPr>
+            <a:r>
+              <a:rPr sz="1500">
+                <a:solidFill>
+                  <a:srgbClr val="22282E"/>
+                </a:solidFill>
+              </a:rPr>
+              <a:t>•  de ese sitio. Eso significa que si estás autenticado en banco.com y visitas una página maliciosa,</a:t>
+            </a:r>
+          </a:p>
+          <a:p>
+            <a:pPr>
+              <a:spcAft>
+                <a:spcPts val="600"/>
+              </a:spcAft>
+            </a:pPr>
+            <a:r>
+              <a:rPr sz="1500">
+                <a:solidFill>
+                  <a:srgbClr val="22282E"/>
+                </a:solidFill>
+              </a:rPr>
+              <a:t>•  esa página puede hacer que tu navegador envíe una petición a banco.com con tu cookie de sesión</a:t>
+            </a:r>
+          </a:p>
+          <a:p>
+            <a:pPr>
+              <a:spcAft>
+                <a:spcPts val="600"/>
+              </a:spcAft>
+            </a:pPr>
+            <a:r>
+              <a:rPr sz="1500">
+                <a:solidFill>
+                  <a:srgbClr val="22282E"/>
+                </a:solidFill>
+              </a:rPr>
+              <a:t>•  incluida, y el banco la procesará como si la hubieras hecho tú. El atacante no roba tu sesión</a:t>
+            </a:r>
+          </a:p>
+          <a:p>
+            <a:pPr>
+              <a:spcAft>
+                <a:spcPts val="600"/>
+              </a:spcAft>
+            </a:pPr>
+            <a:r>
+              <a:rPr sz="1500">
+                <a:solidFill>
+                  <a:srgbClr val="22282E"/>
+                </a:solidFill>
+              </a:rPr>
+              <a:t>•  —como en el XSS— sino que la usa a ciegas: consigue que realices una acción que cambia estado</a:t>
+            </a:r>
+          </a:p>
+          <a:p>
+            <a:pPr>
+              <a:spcAft>
+                <a:spcPts val="600"/>
+              </a:spcAft>
+            </a:pPr>
+            <a:r>
+              <a:rPr sz="1500">
+                <a:solidFill>
+                  <a:srgbClr val="22282E"/>
+                </a:solidFill>
+              </a:rPr>
+              <a:t>•  (transferir dinero, cambiar tu correo, borrar algo) sin tu intención y sin ver el resultado.</a:t>
             </a:r>
           </a:p>
         </p:txBody>
@@ -4241,7 +4602,7 @@
                   <a:srgbClr val="0B3D2E"/>
                 </a:solidFill>
               </a:rPr>
-              <a:t>🧰 Herramientas y preparación</a:t>
+              <a:t>📖 Definiciones y características</a:t>
             </a:r>
           </a:p>
         </p:txBody>
@@ -4279,37 +4640,82 @@
                   <a:srgbClr val="22282E"/>
                 </a:solidFill>
               </a:rPr>
-              <a:t>•  PortSwigger labs de CSRF y DVWA.</a:t>
-            </a:r>
-          </a:p>
-          <a:p>
-            <a:pPr>
-              <a:spcAft>
-                <a:spcPts val="600"/>
-              </a:spcAft>
-            </a:pPr>
-            <a:r>
-              <a:rPr sz="1500">
-                <a:solidFill>
-                  <a:srgbClr val="22282E"/>
-                </a:solidFill>
-              </a:rPr>
-              <a:t>•  Burp (Community incluye un generador de PoC de CSRF).</a:t>
-            </a:r>
-          </a:p>
-          <a:p>
-            <a:pPr>
-              <a:spcAft>
-                <a:spcPts val="600"/>
-              </a:spcAft>
-            </a:pPr>
-            <a:r>
-              <a:rPr sz="1500">
-                <a:solidFill>
-                  <a:srgbClr val="22282E"/>
-                </a:solidFill>
-              </a:rPr>
-              <a:t>•  Un servidor local simple para alojar el PoC en tu laboratorio.</a:t>
+              <a:t>•  CSRF: forzar una acción autenticada usando la sesión de la víctima desde otro sitio. Característica: explota que el navegador envía cookies automáticamente.</a:t>
+            </a:r>
+          </a:p>
+          <a:p>
+            <a:pPr>
+              <a:spcAft>
+                <a:spcPts val="600"/>
+              </a:spcAft>
+            </a:pPr>
+            <a:r>
+              <a:rPr sz="1500">
+                <a:solidFill>
+                  <a:srgbClr val="22282E"/>
+                </a:solidFill>
+              </a:rPr>
+              <a:t>•  Token anti-CSRF: valor impredecible ligado a la sesión que debe acompañar cada acción. Característica: el atacante no puede adivinarlo.</a:t>
+            </a:r>
+          </a:p>
+          <a:p>
+            <a:pPr>
+              <a:spcAft>
+                <a:spcPts val="600"/>
+              </a:spcAft>
+            </a:pPr>
+            <a:r>
+              <a:rPr sz="1500">
+                <a:solidFill>
+                  <a:srgbClr val="22282E"/>
+                </a:solidFill>
+              </a:rPr>
+              <a:t>•  SameSite: atributo de cookie que limita su envío entre sitios. Característica: Lax/Strict mitigan gran parte del CSRF.</a:t>
+            </a:r>
+          </a:p>
+          <a:p>
+            <a:pPr>
+              <a:spcAft>
+                <a:spcPts val="600"/>
+              </a:spcAft>
+            </a:pPr>
+            <a:r>
+              <a:rPr sz="1500">
+                <a:solidFill>
+                  <a:srgbClr val="22282E"/>
+                </a:solidFill>
+              </a:rPr>
+              <a:t>•  Verificación de Origin/Referer: comprobar el origen de la petición. Característica: defensa complementaria.</a:t>
+            </a:r>
+          </a:p>
+          <a:p>
+            <a:pPr>
+              <a:spcAft>
+                <a:spcPts val="600"/>
+              </a:spcAft>
+            </a:pPr>
+            <a:r>
+              <a:rPr sz="1500">
+                <a:solidFill>
+                  <a:srgbClr val="22282E"/>
+                </a:solidFill>
+              </a:rPr>
+              <a:t>•  PoC (Proof of Concept): página que dispara la acción automáticamente. Característica: prueba el impacto real.</a:t>
+            </a:r>
+          </a:p>
+          <a:p>
+            <a:pPr>
+              <a:spcAft>
+                <a:spcPts val="600"/>
+              </a:spcAft>
+            </a:pPr>
+            <a:r>
+              <a:rPr sz="1500">
+                <a:solidFill>
+                  <a:srgbClr val="22282E"/>
+                </a:solidFill>
+              </a:rPr>
+              <a:t>•  Double-submit cookie: patrón donde el token va en cookie y en cuerpo. Característica: alternativa sin estado en servidor.</a:t>
             </a:r>
           </a:p>
         </p:txBody>
@@ -4360,7 +4766,7 @@
                   <a:srgbClr val="0B3D2E"/>
                 </a:solidFill>
               </a:rPr>
-              <a:t>🧪 Laboratorio guiado</a:t>
+              <a:t>📔 Glosario</a:t>
             </a:r>
           </a:p>
         </p:txBody>
@@ -4398,97 +4804,97 @@
                   <a:srgbClr val="22282E"/>
                 </a:solidFill>
               </a:rPr>
-              <a:t>•  En DVWA → CSRF, identifica la petición que cambia la contraseña.</a:t>
-            </a:r>
-          </a:p>
-          <a:p>
-            <a:pPr>
-              <a:spcAft>
-                <a:spcPts val="600"/>
-              </a:spcAft>
-            </a:pPr>
-            <a:r>
-              <a:rPr sz="1500">
-                <a:solidFill>
-                  <a:srgbClr val="22282E"/>
-                </a:solidFill>
-              </a:rPr>
-              <a:t>•  Comprueba si requiere token anti-CSRF. Si no, es explotable.</a:t>
-            </a:r>
-          </a:p>
-          <a:p>
-            <a:pPr>
-              <a:spcAft>
-                <a:spcPts val="600"/>
-              </a:spcAft>
-            </a:pPr>
-            <a:r>
-              <a:rPr sz="1500">
-                <a:solidFill>
-                  <a:srgbClr val="22282E"/>
-                </a:solidFill>
-              </a:rPr>
-              <a:t>•  Genera un PoC con Burp (clic derecho en la request → Engagement tools → Generate CSRF PoC).</a:t>
-            </a:r>
-          </a:p>
-          <a:p>
-            <a:pPr>
-              <a:spcAft>
-                <a:spcPts val="600"/>
-              </a:spcAft>
-            </a:pPr>
-            <a:r>
-              <a:rPr sz="1500">
-                <a:solidFill>
-                  <a:srgbClr val="22282E"/>
-                </a:solidFill>
-              </a:rPr>
-              <a:t>•  Aloja el PoC en tu servidor de lab y ábrelo con una sesión de víctima activa:</a:t>
-            </a:r>
-          </a:p>
-          <a:p>
-            <a:pPr>
-              <a:spcAft>
-                <a:spcPts val="600"/>
-              </a:spcAft>
-            </a:pPr>
-            <a:r>
-              <a:rPr sz="1500">
-                <a:solidFill>
-                  <a:srgbClr val="22282E"/>
-                </a:solidFill>
-              </a:rPr>
-              <a:t>•  &lt;form action="http://dvwa.local/vulnerabilities/csrf/" method="POST"&gt;</a:t>
-            </a:r>
-          </a:p>
-          <a:p>
-            <a:pPr>
-              <a:spcAft>
-                <a:spcPts val="600"/>
-              </a:spcAft>
-            </a:pPr>
-            <a:r>
-              <a:rPr sz="1500">
-                <a:solidFill>
-                  <a:srgbClr val="22282E"/>
-                </a:solidFill>
-              </a:rPr>
-              <a:t>•  &lt;input type="hidden" name="passwordnew" value="hacked"&gt;</a:t>
-            </a:r>
-          </a:p>
-          <a:p>
-            <a:pPr>
-              <a:spcAft>
-                <a:spcPts val="600"/>
-              </a:spcAft>
-            </a:pPr>
-            <a:r>
-              <a:rPr sz="1500">
-                <a:solidFill>
-                  <a:srgbClr val="22282E"/>
-                </a:solidFill>
-              </a:rPr>
-              <a:t>•  &lt;input type="hidden" name="passwordconf" value="hacked"&gt;</a:t>
+              <a:t>•  Término — Definición concisa</a:t>
+            </a:r>
+          </a:p>
+          <a:p>
+            <a:pPr>
+              <a:spcAft>
+                <a:spcPts val="600"/>
+              </a:spcAft>
+            </a:pPr>
+            <a:r>
+              <a:rPr sz="1500">
+                <a:solidFill>
+                  <a:srgbClr val="22282E"/>
+                </a:solidFill>
+              </a:rPr>
+              <a:t>•  CSRF — Forzar al navegador de la víctima a hacer una acción autenticada</a:t>
+            </a:r>
+          </a:p>
+          <a:p>
+            <a:pPr>
+              <a:spcAft>
+                <a:spcPts val="600"/>
+              </a:spcAft>
+            </a:pPr>
+            <a:r>
+              <a:rPr sz="1500">
+                <a:solidFill>
+                  <a:srgbClr val="22282E"/>
+                </a:solidFill>
+              </a:rPr>
+              <a:t>•  Envío automático de cookies — El navegador adjunta la cookie sin importar el origen</a:t>
+            </a:r>
+          </a:p>
+          <a:p>
+            <a:pPr>
+              <a:spcAft>
+                <a:spcPts val="600"/>
+              </a:spcAft>
+            </a:pPr>
+            <a:r>
+              <a:rPr sz="1500">
+                <a:solidFill>
+                  <a:srgbClr val="22282E"/>
+                </a:solidFill>
+              </a:rPr>
+              <a:t>•  Acción que cambia estado — Requisito: transferir, cambiar correo, borrar</a:t>
+            </a:r>
+          </a:p>
+          <a:p>
+            <a:pPr>
+              <a:spcAft>
+                <a:spcPts val="600"/>
+              </a:spcAft>
+            </a:pPr>
+            <a:r>
+              <a:rPr sz="1500">
+                <a:solidFill>
+                  <a:srgbClr val="22282E"/>
+                </a:solidFill>
+              </a:rPr>
+              <a:t>•  Autenticación por cookie — Requisito: la sesión depende solo de la cookie</a:t>
+            </a:r>
+          </a:p>
+          <a:p>
+            <a:pPr>
+              <a:spcAft>
+                <a:spcPts val="600"/>
+              </a:spcAft>
+            </a:pPr>
+            <a:r>
+              <a:rPr sz="1500">
+                <a:solidFill>
+                  <a:srgbClr val="22282E"/>
+                </a:solidFill>
+              </a:rPr>
+              <a:t>•  Parámetros predecibles — Requisito: sin un secreto que el atacante no pueda poner</a:t>
+            </a:r>
+          </a:p>
+          <a:p>
+            <a:pPr>
+              <a:spcAft>
+                <a:spcPts val="600"/>
+              </a:spcAft>
+            </a:pPr>
+            <a:r>
+              <a:rPr sz="1500">
+                <a:solidFill>
+                  <a:srgbClr val="22282E"/>
+                </a:solidFill>
+              </a:rPr>
+              <a:t>•  Formulario auto-enviado — PoC clásica alojada en la página del atacante</a:t>
             </a:r>
           </a:p>
         </p:txBody>
@@ -4539,7 +4945,7 @@
                   <a:srgbClr val="0B3D2E"/>
                 </a:solidFill>
               </a:rPr>
-              <a:t>✍️ Ejercicios</a:t>
+              <a:t>🧰 Herramientas y preparación</a:t>
             </a:r>
           </a:p>
         </p:txBody>
@@ -4577,82 +4983,37 @@
                   <a:srgbClr val="22282E"/>
                 </a:solidFill>
               </a:rPr>
-              <a:t>•  Construye un PoC GET y otro POST para la misma acción.</a:t>
-            </a:r>
-          </a:p>
-          <a:p>
-            <a:pPr>
-              <a:spcAft>
-                <a:spcPts val="600"/>
-              </a:spcAft>
-            </a:pPr>
-            <a:r>
-              <a:rPr sz="1500">
-                <a:solidFill>
-                  <a:srgbClr val="22282E"/>
-                </a:solidFill>
-              </a:rPr>
-              <a:t>•  Explica por qué SameSite=Strict puede romper flujos legítimos.</a:t>
-            </a:r>
-          </a:p>
-          <a:p>
-            <a:pPr>
-              <a:spcAft>
-                <a:spcPts val="600"/>
-              </a:spcAft>
-            </a:pPr>
-            <a:r>
-              <a:rPr sz="1500">
-                <a:solidFill>
-                  <a:srgbClr val="22282E"/>
-                </a:solidFill>
-              </a:rPr>
-              <a:t>•  Evade un token que se valida solo por presencia (no por valor).</a:t>
-            </a:r>
-          </a:p>
-          <a:p>
-            <a:pPr>
-              <a:spcAft>
-                <a:spcPts val="600"/>
-              </a:spcAft>
-            </a:pPr>
-            <a:r>
-              <a:rPr sz="1500">
-                <a:solidFill>
-                  <a:srgbClr val="22282E"/>
-                </a:solidFill>
-              </a:rPr>
-              <a:t>•  Analiza si un endpoint JSON con Content-Type: application/json es CSRF-eable.</a:t>
-            </a:r>
-          </a:p>
-          <a:p>
-            <a:pPr>
-              <a:spcAft>
-                <a:spcPts val="600"/>
-              </a:spcAft>
-            </a:pPr>
-            <a:r>
-              <a:rPr sz="1500">
-                <a:solidFill>
-                  <a:srgbClr val="22282E"/>
-                </a:solidFill>
-              </a:rPr>
-              <a:t>•  Diseña la defensa: token sincronizado + SameSite + verificación de Origin.</a:t>
-            </a:r>
-          </a:p>
-          <a:p>
-            <a:pPr>
-              <a:spcAft>
-                <a:spcPts val="600"/>
-              </a:spcAft>
-            </a:pPr>
-            <a:r>
-              <a:rPr sz="1500">
-                <a:solidFill>
-                  <a:srgbClr val="22282E"/>
-                </a:solidFill>
-              </a:rPr>
-              <a:t>•  Diferencia CSRF de SSRF (nombres parecidos, ataques opuestos).</a:t>
+              <a:t>•  PortSwigger labs de CSRF y DVWA.</a:t>
+            </a:r>
+          </a:p>
+          <a:p>
+            <a:pPr>
+              <a:spcAft>
+                <a:spcPts val="600"/>
+              </a:spcAft>
+            </a:pPr>
+            <a:r>
+              <a:rPr sz="1500">
+                <a:solidFill>
+                  <a:srgbClr val="22282E"/>
+                </a:solidFill>
+              </a:rPr>
+              <a:t>•  Burp (Community incluye un generador de PoC de CSRF).</a:t>
+            </a:r>
+          </a:p>
+          <a:p>
+            <a:pPr>
+              <a:spcAft>
+                <a:spcPts val="600"/>
+              </a:spcAft>
+            </a:pPr>
+            <a:r>
+              <a:rPr sz="1500">
+                <a:solidFill>
+                  <a:srgbClr val="22282E"/>
+                </a:solidFill>
+              </a:rPr>
+              <a:t>•  Un servidor local simple para alojar el PoC en tu laboratorio.</a:t>
             </a:r>
           </a:p>
         </p:txBody>
@@ -4703,7 +5064,7 @@
                   <a:srgbClr val="0B3D2E"/>
                 </a:solidFill>
               </a:rPr>
-              <a:t>📝 Reto verificable</a:t>
+              <a:t>🧪 Laboratorio guiado</a:t>
             </a:r>
           </a:p>
         </p:txBody>
@@ -4741,22 +5102,97 @@
                   <a:srgbClr val="22282E"/>
                 </a:solidFill>
               </a:rPr>
-              <a:t>•  Resuelve un lab de CSRF de PortSwigger que tenga una defensa parcial (token mal validado) y demuestra el cambio de email de la víctima.</a:t>
-            </a:r>
-          </a:p>
-          <a:p>
-            <a:pPr>
-              <a:spcAft>
-                <a:spcPts val="600"/>
-              </a:spcAft>
-            </a:pPr>
-            <a:r>
-              <a:rPr sz="1500">
-                <a:solidFill>
-                  <a:srgbClr val="22282E"/>
-                </a:solidFill>
-              </a:rPr>
-              <a:t>•  Criterio de aceptación: el lab queda resuelto, entregas el PoC funcional y explicas exactamente qué debilidad del token permitió el bypass y cómo se corrige.</a:t>
+              <a:t>•  En DVWA → CSRF, identifica la petición que cambia la contraseña.</a:t>
+            </a:r>
+          </a:p>
+          <a:p>
+            <a:pPr>
+              <a:spcAft>
+                <a:spcPts val="600"/>
+              </a:spcAft>
+            </a:pPr>
+            <a:r>
+              <a:rPr sz="1500">
+                <a:solidFill>
+                  <a:srgbClr val="22282E"/>
+                </a:solidFill>
+              </a:rPr>
+              <a:t>•  Comprueba si requiere token anti-CSRF. Si no, es explotable.</a:t>
+            </a:r>
+          </a:p>
+          <a:p>
+            <a:pPr>
+              <a:spcAft>
+                <a:spcPts val="600"/>
+              </a:spcAft>
+            </a:pPr>
+            <a:r>
+              <a:rPr sz="1500">
+                <a:solidFill>
+                  <a:srgbClr val="22282E"/>
+                </a:solidFill>
+              </a:rPr>
+              <a:t>•  Genera un PoC con Burp (clic derecho en la request → Engagement tools → Generate CSRF PoC).</a:t>
+            </a:r>
+          </a:p>
+          <a:p>
+            <a:pPr>
+              <a:spcAft>
+                <a:spcPts val="600"/>
+              </a:spcAft>
+            </a:pPr>
+            <a:r>
+              <a:rPr sz="1500">
+                <a:solidFill>
+                  <a:srgbClr val="22282E"/>
+                </a:solidFill>
+              </a:rPr>
+              <a:t>•  Aloja el PoC en tu servidor de lab y ábrelo con una sesión de víctima activa:</a:t>
+            </a:r>
+          </a:p>
+          <a:p>
+            <a:pPr>
+              <a:spcAft>
+                <a:spcPts val="600"/>
+              </a:spcAft>
+            </a:pPr>
+            <a:r>
+              <a:rPr sz="1500">
+                <a:solidFill>
+                  <a:srgbClr val="22282E"/>
+                </a:solidFill>
+              </a:rPr>
+              <a:t>•  Verifica que la contraseña cambió sin la interacción consciente de la víctima.</a:t>
+            </a:r>
+          </a:p>
+          <a:p>
+            <a:pPr>
+              <a:spcAft>
+                <a:spcPts val="600"/>
+              </a:spcAft>
+            </a:pPr>
+            <a:r>
+              <a:rPr sz="1500">
+                <a:solidFill>
+                  <a:srgbClr val="22282E"/>
+                </a:solidFill>
+              </a:rPr>
+              <a:t>•  En un lab con token, intenta el bypass: quitar el token, reutilizar uno viejo, cambiar método.</a:t>
+            </a:r>
+          </a:p>
+          <a:p>
+            <a:pPr>
+              <a:spcAft>
+                <a:spcPts val="600"/>
+              </a:spcAft>
+            </a:pPr>
+            <a:r>
+              <a:rPr sz="1500">
+                <a:solidFill>
+                  <a:srgbClr val="22282E"/>
+                </a:solidFill>
+              </a:rPr>
+              <a:t>•  Prueba el efecto de la cookie SameSite=Lax en el ataque.</a:t>
             </a:r>
           </a:p>
         </p:txBody>
